--- a/classes/parte-13-seguridad-movil-iot-e-inalambrica/267-hacking-de-firmware/clase-267-presentacion.pptx
+++ b/classes/parte-13-seguridad-movil-iot-e-inalambrica/267-hacking-de-firmware/clase-267-presentacion.pptx
@@ -17,6 +17,10 @@
     <p:sldId id="265" r:id="rId16"/>
     <p:sldId id="266" r:id="rId17"/>
     <p:sldId id="267" r:id="rId18"/>
+    <p:sldId id="268" r:id="rId19"/>
+    <p:sldId id="269" r:id="rId20"/>
+    <p:sldId id="270" r:id="rId21"/>
+    <p:sldId id="271" r:id="rId22"/>
   </p:sldIdLst>
   <p:sldSz cx="9144000" cy="6858000" type="screen4x3"/>
   <p:notesSz cx="6858000" cy="9144000"/>
@@ -3198,7 +3202,7 @@
                   <a:srgbClr val="0B3D2E"/>
                 </a:solidFill>
               </a:rPr>
-              <a:t>⚠️ Errores comunes</a:t>
+              <a:t>🧪 Laboratorio guiado</a:t>
             </a:r>
           </a:p>
         </p:txBody>
@@ -3236,67 +3240,97 @@
                   <a:srgbClr val="22282E"/>
                 </a:solidFill>
               </a:rPr>
-              <a:t>•  binwalk no extrae nada — Firmware cifrado (alta entropía); busca la clave o vuelca el flash directamente</a:t>
-            </a:r>
-          </a:p>
-          <a:p>
-            <a:pPr>
-              <a:spcAft>
-                <a:spcPts val="600"/>
-              </a:spcAft>
-            </a:pPr>
-            <a:r>
-              <a:rPr sz="1500">
-                <a:solidFill>
-                  <a:srgbClr val="22282E"/>
-                </a:solidFill>
-              </a:rPr>
-              <a:t>•  unsquashfs falla — Variante/compresión no estándar (LZMA/XZ); usa binwalk con soporte o sasquatch</a:t>
-            </a:r>
-          </a:p>
-          <a:p>
-            <a:pPr>
-              <a:spcAft>
-                <a:spcPts val="600"/>
-              </a:spcAft>
-            </a:pPr>
-            <a:r>
-              <a:rPr sz="1500">
-                <a:solidFill>
-                  <a:srgbClr val="22282E"/>
-                </a:solidFill>
-              </a:rPr>
-              <a:t>•  Emulación no arranca la web — Falta NVRAM/hardware; usa Firmadyne que la simula</a:t>
-            </a:r>
-          </a:p>
-          <a:p>
-            <a:pPr>
-              <a:spcAft>
-                <a:spcPts val="600"/>
-              </a:spcAft>
-            </a:pPr>
-            <a:r>
-              <a:rPr sz="1500">
-                <a:solidFill>
-                  <a:srgbClr val="22282E"/>
-                </a:solidFill>
-              </a:rPr>
-              <a:t>•  Binario no corre en QEMU — Arquitectura equivocada; usa qemu-&lt;arch&gt; correcto y libs</a:t>
-            </a:r>
-          </a:p>
-          <a:p>
-            <a:pPr>
-              <a:spcAft>
-                <a:spcPts val="600"/>
-              </a:spcAft>
-            </a:pPr>
-            <a:r>
-              <a:rPr sz="1500">
-                <a:solidFill>
-                  <a:srgbClr val="22282E"/>
-                </a:solidFill>
-              </a:rPr>
-              <a:t>•  Solo veo un blob — Partición única; segméntala por offsets de binwalk</a:t>
+              <a:t>•  Obtén el firmware: descarga la imagen oficial de un router propio o usa DVRF/IoTGoat.</a:t>
+            </a:r>
+          </a:p>
+          <a:p>
+            <a:pPr>
+              <a:spcAft>
+                <a:spcPts val="600"/>
+              </a:spcAft>
+            </a:pPr>
+            <a:r>
+              <a:rPr sz="1500">
+                <a:solidFill>
+                  <a:srgbClr val="22282E"/>
+                </a:solidFill>
+              </a:rPr>
+              <a:t>•  Reconoce la imagen: binwalk firmware.bin y observa entropía con binwalk -E para detectar cifrado.</a:t>
+            </a:r>
+          </a:p>
+          <a:p>
+            <a:pPr>
+              <a:spcAft>
+                <a:spcPts val="600"/>
+              </a:spcAft>
+            </a:pPr>
+            <a:r>
+              <a:rPr sz="1500">
+                <a:solidFill>
+                  <a:srgbClr val="22282E"/>
+                </a:solidFill>
+              </a:rPr>
+              <a:t>•  Extrae el rootfs: binwalk -e o unsquashfs; localiza /etc, /bin, /www.</a:t>
+            </a:r>
+          </a:p>
+          <a:p>
+            <a:pPr>
+              <a:spcAft>
+                <a:spcPts val="600"/>
+              </a:spcAft>
+            </a:pPr>
+            <a:r>
+              <a:rPr sz="1500">
+                <a:solidFill>
+                  <a:srgbClr val="22282E"/>
+                </a:solidFill>
+              </a:rPr>
+              <a:t>•  Caza secretos: busca shadow/passwd, claves privadas, certificados, cadenas de conexión y credenciales hardcodeadas.</a:t>
+            </a:r>
+          </a:p>
+          <a:p>
+            <a:pPr>
+              <a:spcAft>
+                <a:spcPts val="600"/>
+              </a:spcAft>
+            </a:pPr>
+            <a:r>
+              <a:rPr sz="1500">
+                <a:solidFill>
+                  <a:srgbClr val="22282E"/>
+                </a:solidFill>
+              </a:rPr>
+              <a:t>•  Analiza binarios: identifica servicios (httpd, telnetd) y ábrelos en Ghidra buscando funciones peligrosas (strcpy, system).</a:t>
+            </a:r>
+          </a:p>
+          <a:p>
+            <a:pPr>
+              <a:spcAft>
+                <a:spcPts val="600"/>
+              </a:spcAft>
+            </a:pPr>
+            <a:r>
+              <a:rPr sz="1500">
+                <a:solidFill>
+                  <a:srgbClr val="22282E"/>
+                </a:solidFill>
+              </a:rPr>
+              <a:t>•  Emula: ejecuta el firmware con FAT/Firmadyne y accede a su interfaz web para pruebas dinámicas.</a:t>
+            </a:r>
+          </a:p>
+          <a:p>
+            <a:pPr>
+              <a:spcAft>
+                <a:spcPts val="600"/>
+              </a:spcAft>
+            </a:pPr>
+            <a:r>
+              <a:rPr sz="1500">
+                <a:solidFill>
+                  <a:srgbClr val="22282E"/>
+                </a:solidFill>
+              </a:rPr>
+              <a:t>•  Revisa el OTA: analiza si la imagen está firmada/cifrada e intenta comprender el mecanismo de actualización.</a:t>
             </a:r>
           </a:p>
         </p:txBody>
@@ -3347,7 +3381,7 @@
                   <a:srgbClr val="0B3D2E"/>
                 </a:solidFill>
               </a:rPr>
-              <a:t>❓ Preguntas frecuentes</a:t>
+              <a:t>✍️ Ejercicios</a:t>
             </a:r>
           </a:p>
         </p:txBody>
@@ -3385,82 +3419,82 @@
                   <a:srgbClr val="22282E"/>
                 </a:solidFill>
               </a:rPr>
-              <a:t>•  ❓ ¿Cómo obtengo el firmware si no hay descarga oficial?</a:t>
-            </a:r>
-          </a:p>
-          <a:p>
-            <a:pPr>
-              <a:spcAft>
-                <a:spcPts val="600"/>
-              </a:spcAft>
-            </a:pPr>
-            <a:r>
-              <a:rPr sz="1500">
-                <a:solidFill>
-                  <a:srgbClr val="22282E"/>
-                </a:solidFill>
-              </a:rPr>
-              <a:t>•  Puedes volcarlo del chip de flash por SPI/JTAG (clase 268), interceptar una actualización OTA, o extraerlo desde la app/nube del fabricante.</a:t>
-            </a:r>
-          </a:p>
-          <a:p>
-            <a:pPr>
-              <a:spcAft>
-                <a:spcPts val="600"/>
-              </a:spcAft>
-            </a:pPr>
-            <a:r>
-              <a:rPr sz="1500">
-                <a:solidFill>
-                  <a:srgbClr val="22282E"/>
-                </a:solidFill>
-              </a:rPr>
-              <a:t>•  ❓ ¿Qué hago si el firmware está cifrado?</a:t>
-            </a:r>
-          </a:p>
-          <a:p>
-            <a:pPr>
-              <a:spcAft>
-                <a:spcPts val="600"/>
-              </a:spcAft>
-            </a:pPr>
-            <a:r>
-              <a:rPr sz="1500">
-                <a:solidFill>
-                  <a:srgbClr val="22282E"/>
-                </a:solidFill>
-              </a:rPr>
-              <a:t>•  Busca la clave en el bootloader o en una versión previa sin cifrar, o vuelca la RAM/flash tras el descifrado en tiempo de ejecución mediante acceso hardware.</a:t>
-            </a:r>
-          </a:p>
-          <a:p>
-            <a:pPr>
-              <a:spcAft>
-                <a:spcPts val="600"/>
-              </a:spcAft>
-            </a:pPr>
-            <a:r>
-              <a:rPr sz="1500">
-                <a:solidFill>
-                  <a:srgbClr val="22282E"/>
-                </a:solidFill>
-              </a:rPr>
-              <a:t>•  ❓ ¿La emulación reemplaza al hardware real?</a:t>
-            </a:r>
-          </a:p>
-          <a:p>
-            <a:pPr>
-              <a:spcAft>
-                <a:spcPts val="600"/>
-              </a:spcAft>
-            </a:pPr>
-            <a:r>
-              <a:rPr sz="1500">
-                <a:solidFill>
-                  <a:srgbClr val="22282E"/>
-                </a:solidFill>
-              </a:rPr>
-              <a:t>•  Para muchas pruebas de la interfaz web y servicios sí, pero periféricos y comportamiento dependiente de hardware requieren el dispositivo físico.</a:t>
+              <a:t>•  Extrae el sistema de ficheros de una imagen de práctica y lista sus servicios de arranque.</a:t>
+            </a:r>
+          </a:p>
+          <a:p>
+            <a:pPr>
+              <a:spcAft>
+                <a:spcPts val="600"/>
+              </a:spcAft>
+            </a:pPr>
+            <a:r>
+              <a:rPr sz="1500">
+                <a:solidFill>
+                  <a:srgbClr val="22282E"/>
+                </a:solidFill>
+              </a:rPr>
+              <a:t>•  Encuentra al menos una credencial o clave embebida y explica su impacto.</a:t>
+            </a:r>
+          </a:p>
+          <a:p>
+            <a:pPr>
+              <a:spcAft>
+                <a:spcPts val="600"/>
+              </a:spcAft>
+            </a:pPr>
+            <a:r>
+              <a:rPr sz="1500">
+                <a:solidFill>
+                  <a:srgbClr val="22282E"/>
+                </a:solidFill>
+              </a:rPr>
+              <a:t>•  Calcula la entropía de la imagen y argumenta si está cifrada.</a:t>
+            </a:r>
+          </a:p>
+          <a:p>
+            <a:pPr>
+              <a:spcAft>
+                <a:spcPts val="600"/>
+              </a:spcAft>
+            </a:pPr>
+            <a:r>
+              <a:rPr sz="1500">
+                <a:solidFill>
+                  <a:srgbClr val="22282E"/>
+                </a:solidFill>
+              </a:rPr>
+              <a:t>•  Identifica en Ghidra un uso peligroso de system() en un binario del firmware.</a:t>
+            </a:r>
+          </a:p>
+          <a:p>
+            <a:pPr>
+              <a:spcAft>
+                <a:spcPts val="600"/>
+              </a:spcAft>
+            </a:pPr>
+            <a:r>
+              <a:rPr sz="1500">
+                <a:solidFill>
+                  <a:srgbClr val="22282E"/>
+                </a:solidFill>
+              </a:rPr>
+              <a:t>•  Emula el firmware y accede a su panel web.</a:t>
+            </a:r>
+          </a:p>
+          <a:p>
+            <a:pPr>
+              <a:spcAft>
+                <a:spcPts val="600"/>
+              </a:spcAft>
+            </a:pPr>
+            <a:r>
+              <a:rPr sz="1500">
+                <a:solidFill>
+                  <a:srgbClr val="22282E"/>
+                </a:solidFill>
+              </a:rPr>
+              <a:t>•  Determina si la actualización del dispositivo está firmada.</a:t>
             </a:r>
           </a:p>
         </p:txBody>
@@ -3511,7 +3545,7 @@
                   <a:srgbClr val="0B3D2E"/>
                 </a:solidFill>
               </a:rPr>
-              <a:t>🔗 Referencias</a:t>
+              <a:t>📝 Reto verificable</a:t>
             </a:r>
           </a:p>
         </p:txBody>
@@ -3549,6 +3583,408 @@
                   <a:srgbClr val="22282E"/>
                 </a:solidFill>
               </a:rPr>
+              <a:t>•  Analiza una imagen de firmware (propia o de práctica) y produce un informe con al menos dos hallazgos: una credencial/clave embebida y una función potencialmente vulnerable en un binario. Criterio de…</a:t>
+            </a:r>
+          </a:p>
+        </p:txBody>
+      </p:sp>
+    </p:spTree>
+  </p:cSld>
+  <p:clrMapOvr>
+    <a:masterClrMapping/>
+  </p:clrMapOvr>
+</p:sld>
+</file>
+
+<file path=ppt/slides/slide13.xml><?xml version="1.0" encoding="utf-8"?>
+<p:sld xmlns:a="http://schemas.openxmlformats.org/drawingml/2006/main" xmlns:p="http://schemas.openxmlformats.org/presentationml/2006/main" xmlns:r="http://schemas.openxmlformats.org/officeDocument/2006/relationships">
+  <p:cSld>
+    <p:spTree>
+      <p:nvGrpSpPr>
+        <p:cNvPr id="1" name=""/>
+        <p:cNvGrpSpPr/>
+        <p:nvPr/>
+      </p:nvGrpSpPr>
+      <p:grpSpPr/>
+      <p:sp>
+        <p:nvSpPr>
+          <p:cNvPr id="2" name="TextBox 1"/>
+          <p:cNvSpPr txBox="1"/>
+          <p:nvPr/>
+        </p:nvSpPr>
+        <p:spPr>
+          <a:xfrm>
+            <a:off x="457200" y="320040"/>
+            <a:ext cx="8229600" cy="822960"/>
+          </a:xfrm>
+          <a:prstGeom prst="rect">
+            <a:avLst/>
+          </a:prstGeom>
+          <a:noFill/>
+        </p:spPr>
+        <p:txBody>
+          <a:bodyPr wrap="square">
+            <a:spAutoFit/>
+          </a:bodyPr>
+          <a:lstStyle/>
+          <a:p>
+            <a:r>
+              <a:rPr sz="2600" b="1">
+                <a:solidFill>
+                  <a:srgbClr val="0B3D2E"/>
+                </a:solidFill>
+              </a:rPr>
+              <a:t>⚠️ Errores comunes</a:t>
+            </a:r>
+          </a:p>
+        </p:txBody>
+      </p:sp>
+      <p:sp>
+        <p:nvSpPr>
+          <p:cNvPr id="3" name="TextBox 2"/>
+          <p:cNvSpPr txBox="1"/>
+          <p:nvPr/>
+        </p:nvSpPr>
+        <p:spPr>
+          <a:xfrm>
+            <a:off x="457200" y="1280160"/>
+            <a:ext cx="8229600" cy="4937760"/>
+          </a:xfrm>
+          <a:prstGeom prst="rect">
+            <a:avLst/>
+          </a:prstGeom>
+          <a:noFill/>
+        </p:spPr>
+        <p:txBody>
+          <a:bodyPr wrap="square">
+            <a:spAutoFit/>
+          </a:bodyPr>
+          <a:lstStyle/>
+          <a:p>
+            <a:pPr>
+              <a:spcAft>
+                <a:spcPts val="600"/>
+              </a:spcAft>
+            </a:pPr>
+            <a:r>
+              <a:rPr sz="1500">
+                <a:solidFill>
+                  <a:srgbClr val="22282E"/>
+                </a:solidFill>
+              </a:rPr>
+              <a:t>•  binwalk no extrae nada — Firmware cifrado (alta entropía); busca la clave o vuelca el flash directamente</a:t>
+            </a:r>
+          </a:p>
+          <a:p>
+            <a:pPr>
+              <a:spcAft>
+                <a:spcPts val="600"/>
+              </a:spcAft>
+            </a:pPr>
+            <a:r>
+              <a:rPr sz="1500">
+                <a:solidFill>
+                  <a:srgbClr val="22282E"/>
+                </a:solidFill>
+              </a:rPr>
+              <a:t>•  unsquashfs falla — Variante/compresión no estándar (LZMA/XZ); usa binwalk con soporte o sasquatch</a:t>
+            </a:r>
+          </a:p>
+          <a:p>
+            <a:pPr>
+              <a:spcAft>
+                <a:spcPts val="600"/>
+              </a:spcAft>
+            </a:pPr>
+            <a:r>
+              <a:rPr sz="1500">
+                <a:solidFill>
+                  <a:srgbClr val="22282E"/>
+                </a:solidFill>
+              </a:rPr>
+              <a:t>•  Emulación no arranca la web — Falta NVRAM/hardware; usa Firmadyne que la simula</a:t>
+            </a:r>
+          </a:p>
+          <a:p>
+            <a:pPr>
+              <a:spcAft>
+                <a:spcPts val="600"/>
+              </a:spcAft>
+            </a:pPr>
+            <a:r>
+              <a:rPr sz="1500">
+                <a:solidFill>
+                  <a:srgbClr val="22282E"/>
+                </a:solidFill>
+              </a:rPr>
+              <a:t>•  Binario no corre en QEMU — Arquitectura equivocada; usa qemu-&lt;arch&gt; correcto y libs</a:t>
+            </a:r>
+          </a:p>
+          <a:p>
+            <a:pPr>
+              <a:spcAft>
+                <a:spcPts val="600"/>
+              </a:spcAft>
+            </a:pPr>
+            <a:r>
+              <a:rPr sz="1500">
+                <a:solidFill>
+                  <a:srgbClr val="22282E"/>
+                </a:solidFill>
+              </a:rPr>
+              <a:t>•  Solo veo un blob — Partición única; segméntala por offsets de binwalk</a:t>
+            </a:r>
+          </a:p>
+        </p:txBody>
+      </p:sp>
+    </p:spTree>
+  </p:cSld>
+  <p:clrMapOvr>
+    <a:masterClrMapping/>
+  </p:clrMapOvr>
+</p:sld>
+</file>
+
+<file path=ppt/slides/slide14.xml><?xml version="1.0" encoding="utf-8"?>
+<p:sld xmlns:a="http://schemas.openxmlformats.org/drawingml/2006/main" xmlns:p="http://schemas.openxmlformats.org/presentationml/2006/main" xmlns:r="http://schemas.openxmlformats.org/officeDocument/2006/relationships">
+  <p:cSld>
+    <p:spTree>
+      <p:nvGrpSpPr>
+        <p:cNvPr id="1" name=""/>
+        <p:cNvGrpSpPr/>
+        <p:nvPr/>
+      </p:nvGrpSpPr>
+      <p:grpSpPr/>
+      <p:sp>
+        <p:nvSpPr>
+          <p:cNvPr id="2" name="TextBox 1"/>
+          <p:cNvSpPr txBox="1"/>
+          <p:nvPr/>
+        </p:nvSpPr>
+        <p:spPr>
+          <a:xfrm>
+            <a:off x="457200" y="320040"/>
+            <a:ext cx="8229600" cy="822960"/>
+          </a:xfrm>
+          <a:prstGeom prst="rect">
+            <a:avLst/>
+          </a:prstGeom>
+          <a:noFill/>
+        </p:spPr>
+        <p:txBody>
+          <a:bodyPr wrap="square">
+            <a:spAutoFit/>
+          </a:bodyPr>
+          <a:lstStyle/>
+          <a:p>
+            <a:r>
+              <a:rPr sz="2600" b="1">
+                <a:solidFill>
+                  <a:srgbClr val="0B3D2E"/>
+                </a:solidFill>
+              </a:rPr>
+              <a:t>❓ Preguntas frecuentes</a:t>
+            </a:r>
+          </a:p>
+        </p:txBody>
+      </p:sp>
+      <p:sp>
+        <p:nvSpPr>
+          <p:cNvPr id="3" name="TextBox 2"/>
+          <p:cNvSpPr txBox="1"/>
+          <p:nvPr/>
+        </p:nvSpPr>
+        <p:spPr>
+          <a:xfrm>
+            <a:off x="457200" y="1280160"/>
+            <a:ext cx="8229600" cy="4937760"/>
+          </a:xfrm>
+          <a:prstGeom prst="rect">
+            <a:avLst/>
+          </a:prstGeom>
+          <a:noFill/>
+        </p:spPr>
+        <p:txBody>
+          <a:bodyPr wrap="square">
+            <a:spAutoFit/>
+          </a:bodyPr>
+          <a:lstStyle/>
+          <a:p>
+            <a:pPr>
+              <a:spcAft>
+                <a:spcPts val="600"/>
+              </a:spcAft>
+            </a:pPr>
+            <a:r>
+              <a:rPr sz="1500">
+                <a:solidFill>
+                  <a:srgbClr val="22282E"/>
+                </a:solidFill>
+              </a:rPr>
+              <a:t>•  ❓ ¿Cómo obtengo el firmware si no hay descarga oficial?</a:t>
+            </a:r>
+          </a:p>
+          <a:p>
+            <a:pPr>
+              <a:spcAft>
+                <a:spcPts val="600"/>
+              </a:spcAft>
+            </a:pPr>
+            <a:r>
+              <a:rPr sz="1500">
+                <a:solidFill>
+                  <a:srgbClr val="22282E"/>
+                </a:solidFill>
+              </a:rPr>
+              <a:t>•  Puedes volcarlo del chip de flash por SPI/JTAG (clase 268), interceptar una actualización OTA, o extraerlo desde la app/nube del fabricante.</a:t>
+            </a:r>
+          </a:p>
+          <a:p>
+            <a:pPr>
+              <a:spcAft>
+                <a:spcPts val="600"/>
+              </a:spcAft>
+            </a:pPr>
+            <a:r>
+              <a:rPr sz="1500">
+                <a:solidFill>
+                  <a:srgbClr val="22282E"/>
+                </a:solidFill>
+              </a:rPr>
+              <a:t>•  ❓ ¿Qué hago si el firmware está cifrado?</a:t>
+            </a:r>
+          </a:p>
+          <a:p>
+            <a:pPr>
+              <a:spcAft>
+                <a:spcPts val="600"/>
+              </a:spcAft>
+            </a:pPr>
+            <a:r>
+              <a:rPr sz="1500">
+                <a:solidFill>
+                  <a:srgbClr val="22282E"/>
+                </a:solidFill>
+              </a:rPr>
+              <a:t>•  Busca la clave en el bootloader o en una versión previa sin cifrar, o vuelca la RAM/flash tras el descifrado en tiempo de ejecución mediante acceso hardware.</a:t>
+            </a:r>
+          </a:p>
+          <a:p>
+            <a:pPr>
+              <a:spcAft>
+                <a:spcPts val="600"/>
+              </a:spcAft>
+            </a:pPr>
+            <a:r>
+              <a:rPr sz="1500">
+                <a:solidFill>
+                  <a:srgbClr val="22282E"/>
+                </a:solidFill>
+              </a:rPr>
+              <a:t>•  ❓ ¿La emulación reemplaza al hardware real?</a:t>
+            </a:r>
+          </a:p>
+          <a:p>
+            <a:pPr>
+              <a:spcAft>
+                <a:spcPts val="600"/>
+              </a:spcAft>
+            </a:pPr>
+            <a:r>
+              <a:rPr sz="1500">
+                <a:solidFill>
+                  <a:srgbClr val="22282E"/>
+                </a:solidFill>
+              </a:rPr>
+              <a:t>•  Para muchas pruebas de la interfaz web y servicios sí, pero periféricos y comportamiento dependiente de hardware requieren el dispositivo físico.</a:t>
+            </a:r>
+          </a:p>
+        </p:txBody>
+      </p:sp>
+    </p:spTree>
+  </p:cSld>
+  <p:clrMapOvr>
+    <a:masterClrMapping/>
+  </p:clrMapOvr>
+</p:sld>
+</file>
+
+<file path=ppt/slides/slide15.xml><?xml version="1.0" encoding="utf-8"?>
+<p:sld xmlns:a="http://schemas.openxmlformats.org/drawingml/2006/main" xmlns:p="http://schemas.openxmlformats.org/presentationml/2006/main" xmlns:r="http://schemas.openxmlformats.org/officeDocument/2006/relationships">
+  <p:cSld>
+    <p:spTree>
+      <p:nvGrpSpPr>
+        <p:cNvPr id="1" name=""/>
+        <p:cNvGrpSpPr/>
+        <p:nvPr/>
+      </p:nvGrpSpPr>
+      <p:grpSpPr/>
+      <p:sp>
+        <p:nvSpPr>
+          <p:cNvPr id="2" name="TextBox 1"/>
+          <p:cNvSpPr txBox="1"/>
+          <p:nvPr/>
+        </p:nvSpPr>
+        <p:spPr>
+          <a:xfrm>
+            <a:off x="457200" y="320040"/>
+            <a:ext cx="8229600" cy="822960"/>
+          </a:xfrm>
+          <a:prstGeom prst="rect">
+            <a:avLst/>
+          </a:prstGeom>
+          <a:noFill/>
+        </p:spPr>
+        <p:txBody>
+          <a:bodyPr wrap="square">
+            <a:spAutoFit/>
+          </a:bodyPr>
+          <a:lstStyle/>
+          <a:p>
+            <a:r>
+              <a:rPr sz="2600" b="1">
+                <a:solidFill>
+                  <a:srgbClr val="0B3D2E"/>
+                </a:solidFill>
+              </a:rPr>
+              <a:t>🔗 Referencias</a:t>
+            </a:r>
+          </a:p>
+        </p:txBody>
+      </p:sp>
+      <p:sp>
+        <p:nvSpPr>
+          <p:cNvPr id="3" name="TextBox 2"/>
+          <p:cNvSpPr txBox="1"/>
+          <p:nvPr/>
+        </p:nvSpPr>
+        <p:spPr>
+          <a:xfrm>
+            <a:off x="457200" y="1280160"/>
+            <a:ext cx="8229600" cy="4937760"/>
+          </a:xfrm>
+          <a:prstGeom prst="rect">
+            <a:avLst/>
+          </a:prstGeom>
+          <a:noFill/>
+        </p:spPr>
+        <p:txBody>
+          <a:bodyPr wrap="square">
+            <a:spAutoFit/>
+          </a:bodyPr>
+          <a:lstStyle/>
+          <a:p>
+            <a:pPr>
+              <a:spcAft>
+                <a:spcPts val="600"/>
+              </a:spcAft>
+            </a:pPr>
+            <a:r>
+              <a:rPr sz="1500">
+                <a:solidFill>
+                  <a:srgbClr val="22282E"/>
+                </a:solidFill>
+              </a:rPr>
               <a:t>•  OWASP Firmware Security Testing Methodology: &lt;https://github.com/scriptingxss/owasp-fstm&gt;</a:t>
             </a:r>
           </a:p>
@@ -3599,6 +4035,81 @@
           </a:p>
         </p:txBody>
       </p:sp>
+    </p:spTree>
+  </p:cSld>
+  <p:clrMapOvr>
+    <a:masterClrMapping/>
+  </p:clrMapOvr>
+</p:sld>
+</file>
+
+<file path=ppt/slides/slide16.xml><?xml version="1.0" encoding="utf-8"?>
+<p:sld xmlns:a="http://schemas.openxmlformats.org/drawingml/2006/main" xmlns:p="http://schemas.openxmlformats.org/presentationml/2006/main" xmlns:r="http://schemas.openxmlformats.org/officeDocument/2006/relationships">
+  <p:cSld>
+    <p:spTree>
+      <p:nvGrpSpPr>
+        <p:cNvPr id="1" name=""/>
+        <p:cNvGrpSpPr/>
+        <p:nvPr/>
+      </p:nvGrpSpPr>
+      <p:grpSpPr/>
+      <p:sp>
+        <p:nvSpPr>
+          <p:cNvPr id="2" name="TextBox 1"/>
+          <p:cNvSpPr txBox="1"/>
+          <p:nvPr/>
+        </p:nvSpPr>
+        <p:spPr>
+          <a:xfrm>
+            <a:off x="457200" y="274320"/>
+            <a:ext cx="8229600" cy="640080"/>
+          </a:xfrm>
+          <a:prstGeom prst="rect">
+            <a:avLst/>
+          </a:prstGeom>
+          <a:noFill/>
+        </p:spPr>
+        <p:txBody>
+          <a:bodyPr wrap="square">
+            <a:spAutoFit/>
+          </a:bodyPr>
+          <a:lstStyle/>
+          <a:p>
+            <a:r>
+              <a:rPr sz="2200" b="1">
+                <a:solidFill>
+                  <a:srgbClr val="0B3D2E"/>
+                </a:solidFill>
+              </a:rPr>
+              <a:t>Diagrama de la clase</a:t>
+            </a:r>
+          </a:p>
+        </p:txBody>
+      </p:sp>
+      <p:pic>
+        <p:nvPicPr>
+          <p:cNvPr id="3" name="Picture 2" descr="223b08cc4dec47da.png"/>
+          <p:cNvPicPr>
+            <a:picLocks noChangeAspect="1"/>
+          </p:cNvPicPr>
+          <p:nvPr/>
+        </p:nvPicPr>
+        <p:blipFill>
+          <a:blip r:embed="rId2"/>
+          <a:stretch>
+            <a:fillRect/>
+          </a:stretch>
+        </p:blipFill>
+        <p:spPr>
+          <a:xfrm>
+            <a:off x="457200" y="2715768"/>
+            <a:ext cx="8229600" cy="2066544"/>
+          </a:xfrm>
+          <a:prstGeom prst="rect">
+            <a:avLst/>
+          </a:prstGeom>
+        </p:spPr>
+      </p:pic>
     </p:spTree>
   </p:cSld>
   <p:clrMapOvr>
@@ -3683,7 +4194,7 @@
                   <a:srgbClr val="22282E"/>
                 </a:solidFill>
               </a:rPr>
-              <a:t>•  Aprender a obtener, desempaquetar y analizar el firmware de un dispositivo embebido para descubrir credenciales, claves, binarios vulnerables y backdoors, y a emular el firmware para pruebas dinámicas. El alumno recorrerá la metodología OWASP FSTM: obtención, extracción del sistema de ficheros, análisis estático, emulación y verificación de la cadena de actualización.</a:t>
+              <a:t>•  Aprender a obtener, desempaquetar y analizar el firmware de un dispositivo embebido para descubrir credenciales, claves, binarios vulnerables y backdoors, y a emular el firmware para pruebas…</a:t>
             </a:r>
           </a:p>
         </p:txBody>
@@ -4092,7 +4603,7 @@
                   <a:srgbClr val="0B3D2E"/>
                 </a:solidFill>
               </a:rPr>
-              <a:t>📖 Definiciones y características</a:t>
+              <a:t>🧠 Explicación en profundidad</a:t>
             </a:r>
           </a:p>
         </p:txBody>
@@ -4130,82 +4641,67 @@
                   <a:srgbClr val="22282E"/>
                 </a:solidFill>
               </a:rPr>
-              <a:t>•  binwalk: herramienta que identifica y extrae firmas de archivos dentro de una imagen de firmware. Característica: automatiza la extracción del sistema de ficheros.</a:t>
-            </a:r>
-          </a:p>
-          <a:p>
-            <a:pPr>
-              <a:spcAft>
-                <a:spcPts val="600"/>
-              </a:spcAft>
-            </a:pPr>
-            <a:r>
-              <a:rPr sz="1500">
-                <a:solidFill>
-                  <a:srgbClr val="22282E"/>
-                </a:solidFill>
-              </a:rPr>
-              <a:t>•  SquashFS: sistema de ficheros comprimido de solo lectura muy común en IoT. Característica: se monta/extrae con unsquashfs.</a:t>
-            </a:r>
-          </a:p>
-          <a:p>
-            <a:pPr>
-              <a:spcAft>
-                <a:spcPts val="600"/>
-              </a:spcAft>
-            </a:pPr>
-            <a:r>
-              <a:rPr sz="1500">
-                <a:solidFill>
-                  <a:srgbClr val="22282E"/>
-                </a:solidFill>
-              </a:rPr>
-              <a:t>•  Firmware Analysis Toolkit (FAT)/Firmadyne: entorno de emulación de firmware con QEMU. Característica: permite ejecutar la interfaz web del dispositivo sin hardware.</a:t>
-            </a:r>
-          </a:p>
-          <a:p>
-            <a:pPr>
-              <a:spcAft>
-                <a:spcPts val="600"/>
-              </a:spcAft>
-            </a:pPr>
-            <a:r>
-              <a:rPr sz="1500">
-                <a:solidFill>
-                  <a:srgbClr val="22282E"/>
-                </a:solidFill>
-              </a:rPr>
-              <a:t>•  Bootloader (U-Boot): cargador de arranque de sistemas embebidos. Característica: su consola puede permitir volcar/flashear memoria.</a:t>
-            </a:r>
-          </a:p>
-          <a:p>
-            <a:pPr>
-              <a:spcAft>
-                <a:spcPts val="600"/>
-              </a:spcAft>
-            </a:pPr>
-            <a:r>
-              <a:rPr sz="1500">
-                <a:solidFill>
-                  <a:srgbClr val="22282E"/>
-                </a:solidFill>
-              </a:rPr>
-              <a:t>•  Firma de firmware: verificación criptográfica de integridad y origen del OTA. Característica: si falta, se puede instalar firmware modificado.</a:t>
-            </a:r>
-          </a:p>
-          <a:p>
-            <a:pPr>
-              <a:spcAft>
-                <a:spcPts val="600"/>
-              </a:spcAft>
-            </a:pPr>
-            <a:r>
-              <a:rPr sz="1500">
-                <a:solidFill>
-                  <a:srgbClr val="22282E"/>
-                </a:solidFill>
-              </a:rPr>
-              <a:t>•  Entropía: medida de aleatoriedad; alta entropía sugiere cifrado o compresión. Característica: ayuda a detectar particiones cifradas.</a:t>
+              <a:t>•  Una imagen puede contener cabecera del fabricante, bootloader, kernel, device tree, rootfs, configuración, particiones de recuperación y firma. binwalk reconoce patrones; un patrón es candidato, no…</a:t>
+            </a:r>
+          </a:p>
+          <a:p>
+            <a:pPr>
+              <a:spcAft>
+                <a:spcPts val="600"/>
+              </a:spcAft>
+            </a:pPr>
+            <a:r>
+              <a:rPr sz="1500">
+                <a:solidFill>
+                  <a:srgbClr val="22282E"/>
+                </a:solidFill>
+              </a:rPr>
+              <a:t>•  El análisis busca cuentas, scripts de inicio, certificados, claves privadas, servicios y mecanismos de actualización. Una cadena encontrada puede ser una clave pública o dato de prueba; se valida…</a:t>
+            </a:r>
+          </a:p>
+          <a:p>
+            <a:pPr>
+              <a:spcAft>
+                <a:spcPts val="600"/>
+              </a:spcAft>
+            </a:pPr>
+            <a:r>
+              <a:rPr sz="1500">
+                <a:solidFill>
+                  <a:srgbClr val="22282E"/>
+                </a:solidFill>
+              </a:rPr>
+              <a:t>•  Firmar actualizaciones protege autenticidad e integridad si la raíz de confianza y la verificación están protegidas. Anti-rollback evita instalar una versión antigua firmada pero vulnerable. NIST SP…</a:t>
+            </a:r>
+          </a:p>
+          <a:p>
+            <a:pPr>
+              <a:spcAft>
+                <a:spcPts val="600"/>
+              </a:spcAft>
+            </a:pPr>
+            <a:r>
+              <a:rPr sz="1500">
+                <a:solidFill>
+                  <a:srgbClr val="22282E"/>
+                </a:solidFill>
+              </a:rPr>
+              <a:t>•  La emulación rara vez reproduce hardware, drivers, secure elements o nube. Sirve para observar servicios bajo supuestos y debe marcarse como parcial. Una prueba que funciona en QEMU no demuestra el…</a:t>
+            </a:r>
+          </a:p>
+          <a:p>
+            <a:pPr>
+              <a:spcAft>
+                <a:spcPts val="600"/>
+              </a:spcAft>
+            </a:pPr>
+            <a:r>
+              <a:rPr sz="1500">
+                <a:solidFill>
+                  <a:srgbClr val="22282E"/>
+                </a:solidFill>
+              </a:rPr>
+              <a:t>•  Dos imágenes oficiales contienen la misma clave privada de servidor. La evidencia se confirma comparando huellas en unidades propias. El problema no es solo «secreto en firmware»: una clave…</a:t>
             </a:r>
           </a:p>
         </p:txBody>
@@ -4256,7 +4752,7 @@
                   <a:srgbClr val="0B3D2E"/>
                 </a:solidFill>
               </a:rPr>
-              <a:t>🧰 Herramientas y preparación</a:t>
+              <a:t>📔 Glosario operativo</a:t>
             </a:r>
           </a:p>
         </p:txBody>
@@ -4294,97 +4790,82 @@
                   <a:srgbClr val="22282E"/>
                 </a:solidFill>
               </a:rPr>
-              <a:t>•  binwalk firmware.bin                         # mapa de componentes</a:t>
-            </a:r>
-          </a:p>
-          <a:p>
-            <a:pPr>
-              <a:spcAft>
-                <a:spcPts val="600"/>
-              </a:spcAft>
-            </a:pPr>
-            <a:r>
-              <a:rPr sz="1500">
-                <a:solidFill>
-                  <a:srgbClr val="22282E"/>
-                </a:solidFill>
-              </a:rPr>
-              <a:t>•  binwalk -e firmware.bin                       # extraer recursivamente</a:t>
-            </a:r>
-          </a:p>
-          <a:p>
-            <a:pPr>
-              <a:spcAft>
-                <a:spcPts val="600"/>
-              </a:spcAft>
-            </a:pPr>
-            <a:r>
-              <a:rPr sz="1500">
-                <a:solidFill>
-                  <a:srgbClr val="22282E"/>
-                </a:solidFill>
-              </a:rPr>
-              <a:t>•  unsquashfs squashfs-root.bin                  # extraer SquashFS</a:t>
-            </a:r>
-          </a:p>
-          <a:p>
-            <a:pPr>
-              <a:spcAft>
-                <a:spcPts val="600"/>
-              </a:spcAft>
-            </a:pPr>
-            <a:r>
-              <a:rPr sz="1500">
-                <a:solidFill>
-                  <a:srgbClr val="22282E"/>
-                </a:solidFill>
-              </a:rPr>
-              <a:t>•  grep -rniE "password|passwd|admin|api[-]?key|BEGIN .PRIVATE KEY" squashfs-root/</a:t>
-            </a:r>
-          </a:p>
-          <a:p>
-            <a:pPr>
-              <a:spcAft>
-                <a:spcPts val="600"/>
-              </a:spcAft>
-            </a:pPr>
-            <a:r>
-              <a:rPr sz="1500">
-                <a:solidFill>
-                  <a:srgbClr val="22282E"/>
-                </a:solidFill>
-              </a:rPr>
-              <a:t>•  find squashfs-root/ -name ".conf" -o -name "shadow" -o -name ".pem"</a:t>
-            </a:r>
-          </a:p>
-          <a:p>
-            <a:pPr>
-              <a:spcAft>
-                <a:spcPts val="600"/>
-              </a:spcAft>
-            </a:pPr>
-            <a:r>
-              <a:rPr sz="1500">
-                <a:solidFill>
-                  <a:srgbClr val="22282E"/>
-                </a:solidFill>
-              </a:rPr>
-              <a:t>•  git clone https://github.com/attify/firmware-analysis-toolkit</a:t>
-            </a:r>
-          </a:p>
-          <a:p>
-            <a:pPr>
-              <a:spcAft>
-                <a:spcPts val="600"/>
-              </a:spcAft>
-            </a:pPr>
-            <a:r>
-              <a:rPr sz="1500">
-                <a:solidFill>
-                  <a:srgbClr val="22282E"/>
-                </a:solidFill>
-              </a:rPr>
-              <a:t>•  ./fat.py firmware.bin</a:t>
+              <a:t>•  Término — Definición útil</a:t>
+            </a:r>
+          </a:p>
+          <a:p>
+            <a:pPr>
+              <a:spcAft>
+                <a:spcPts val="600"/>
+              </a:spcAft>
+            </a:pPr>
+            <a:r>
+              <a:rPr sz="1500">
+                <a:solidFill>
+                  <a:srgbClr val="22282E"/>
+                </a:solidFill>
+              </a:rPr>
+              <a:t>•  Rootfs — Sistema de archivos raíz usado por el runtime embebido.</a:t>
+            </a:r>
+          </a:p>
+          <a:p>
+            <a:pPr>
+              <a:spcAft>
+                <a:spcPts val="600"/>
+              </a:spcAft>
+            </a:pPr>
+            <a:r>
+              <a:rPr sz="1500">
+                <a:solidFill>
+                  <a:srgbClr val="22282E"/>
+                </a:solidFill>
+              </a:rPr>
+              <a:t>•  Bootloader — Código inicial que prepara y carga etapas posteriores.</a:t>
+            </a:r>
+          </a:p>
+          <a:p>
+            <a:pPr>
+              <a:spcAft>
+                <a:spcPts val="600"/>
+              </a:spcAft>
+            </a:pPr>
+            <a:r>
+              <a:rPr sz="1500">
+                <a:solidFill>
+                  <a:srgbClr val="22282E"/>
+                </a:solidFill>
+              </a:rPr>
+              <a:t>•  Anti-rollback — Control que rechaza versiones anteriores aun si están firmadas.</a:t>
+            </a:r>
+          </a:p>
+          <a:p>
+            <a:pPr>
+              <a:spcAft>
+                <a:spcPts val="600"/>
+              </a:spcAft>
+            </a:pPr>
+            <a:r>
+              <a:rPr sz="1500">
+                <a:solidFill>
+                  <a:srgbClr val="22282E"/>
+                </a:solidFill>
+              </a:rPr>
+              <a:t>•  Root of trust — Componente protegido en el que comienza una decisión de confianza.</a:t>
+            </a:r>
+          </a:p>
+          <a:p>
+            <a:pPr>
+              <a:spcAft>
+                <a:spcPts val="600"/>
+              </a:spcAft>
+            </a:pPr>
+            <a:r>
+              <a:rPr sz="1500">
+                <a:solidFill>
+                  <a:srgbClr val="22282E"/>
+                </a:solidFill>
+              </a:rPr>
+              <a:t>•  Emulación parcial — Ejecución aproximada que no reproduce todo el hardware.</a:t>
             </a:r>
           </a:p>
         </p:txBody>
@@ -4435,7 +4916,7 @@
                   <a:srgbClr val="0B3D2E"/>
                 </a:solidFill>
               </a:rPr>
-              <a:t>🧪 Laboratorio guiado</a:t>
+              <a:t>✅ Criterio de dominio</a:t>
             </a:r>
           </a:p>
         </p:txBody>
@@ -4473,97 +4954,7 @@
                   <a:srgbClr val="22282E"/>
                 </a:solidFill>
               </a:rPr>
-              <a:t>•  Obtén el firmware: descarga la imagen oficial de un router propio o usa DVRF/IoTGoat.</a:t>
-            </a:r>
-          </a:p>
-          <a:p>
-            <a:pPr>
-              <a:spcAft>
-                <a:spcPts val="600"/>
-              </a:spcAft>
-            </a:pPr>
-            <a:r>
-              <a:rPr sz="1500">
-                <a:solidFill>
-                  <a:srgbClr val="22282E"/>
-                </a:solidFill>
-              </a:rPr>
-              <a:t>•  Reconoce la imagen: binwalk firmware.bin y observa entropía con binwalk -E para detectar cifrado.</a:t>
-            </a:r>
-          </a:p>
-          <a:p>
-            <a:pPr>
-              <a:spcAft>
-                <a:spcPts val="600"/>
-              </a:spcAft>
-            </a:pPr>
-            <a:r>
-              <a:rPr sz="1500">
-                <a:solidFill>
-                  <a:srgbClr val="22282E"/>
-                </a:solidFill>
-              </a:rPr>
-              <a:t>•  Extrae el rootfs: binwalk -e o unsquashfs; localiza /etc, /bin, /www.</a:t>
-            </a:r>
-          </a:p>
-          <a:p>
-            <a:pPr>
-              <a:spcAft>
-                <a:spcPts val="600"/>
-              </a:spcAft>
-            </a:pPr>
-            <a:r>
-              <a:rPr sz="1500">
-                <a:solidFill>
-                  <a:srgbClr val="22282E"/>
-                </a:solidFill>
-              </a:rPr>
-              <a:t>•  Caza secretos: busca shadow/passwd, claves privadas, certificados, cadenas de conexión y credenciales hardcodeadas.</a:t>
-            </a:r>
-          </a:p>
-          <a:p>
-            <a:pPr>
-              <a:spcAft>
-                <a:spcPts val="600"/>
-              </a:spcAft>
-            </a:pPr>
-            <a:r>
-              <a:rPr sz="1500">
-                <a:solidFill>
-                  <a:srgbClr val="22282E"/>
-                </a:solidFill>
-              </a:rPr>
-              <a:t>•  Analiza binarios: identifica servicios (httpd, telnetd) y ábrelos en Ghidra buscando funciones peligrosas (strcpy, system).</a:t>
-            </a:r>
-          </a:p>
-          <a:p>
-            <a:pPr>
-              <a:spcAft>
-                <a:spcPts val="600"/>
-              </a:spcAft>
-            </a:pPr>
-            <a:r>
-              <a:rPr sz="1500">
-                <a:solidFill>
-                  <a:srgbClr val="22282E"/>
-                </a:solidFill>
-              </a:rPr>
-              <a:t>•  Emula: ejecuta el firmware con FAT/Firmadyne y accede a su interfaz web para pruebas dinámicas.</a:t>
-            </a:r>
-          </a:p>
-          <a:p>
-            <a:pPr>
-              <a:spcAft>
-                <a:spcPts val="600"/>
-              </a:spcAft>
-            </a:pPr>
-            <a:r>
-              <a:rPr sz="1500">
-                <a:solidFill>
-                  <a:srgbClr val="22282E"/>
-                </a:solidFill>
-              </a:rPr>
-              <a:t>•  Revisa el OTA: analiza si la imagen está firmada/cifrada e intenta comprender el mecanismo de actualización.</a:t>
+              <a:t>•  El alumno domina la clase cuando conserva offsets y hashes, distingue detección de validación, explica firma y rollback, identifica una exposición con flujo de uso y limita las conclusiones de la…</a:t>
             </a:r>
           </a:p>
         </p:txBody>
@@ -4614,7 +5005,7 @@
                   <a:srgbClr val="0B3D2E"/>
                 </a:solidFill>
               </a:rPr>
-              <a:t>✍️ Ejercicios</a:t>
+              <a:t>📖 Definiciones y características</a:t>
             </a:r>
           </a:p>
         </p:txBody>
@@ -4652,82 +5043,82 @@
                   <a:srgbClr val="22282E"/>
                 </a:solidFill>
               </a:rPr>
-              <a:t>•  Extrae el sistema de ficheros de una imagen de práctica y lista sus servicios de arranque.</a:t>
-            </a:r>
-          </a:p>
-          <a:p>
-            <a:pPr>
-              <a:spcAft>
-                <a:spcPts val="600"/>
-              </a:spcAft>
-            </a:pPr>
-            <a:r>
-              <a:rPr sz="1500">
-                <a:solidFill>
-                  <a:srgbClr val="22282E"/>
-                </a:solidFill>
-              </a:rPr>
-              <a:t>•  Encuentra al menos una credencial o clave embebida y explica su impacto.</a:t>
-            </a:r>
-          </a:p>
-          <a:p>
-            <a:pPr>
-              <a:spcAft>
-                <a:spcPts val="600"/>
-              </a:spcAft>
-            </a:pPr>
-            <a:r>
-              <a:rPr sz="1500">
-                <a:solidFill>
-                  <a:srgbClr val="22282E"/>
-                </a:solidFill>
-              </a:rPr>
-              <a:t>•  Calcula la entropía de la imagen y argumenta si está cifrada.</a:t>
-            </a:r>
-          </a:p>
-          <a:p>
-            <a:pPr>
-              <a:spcAft>
-                <a:spcPts val="600"/>
-              </a:spcAft>
-            </a:pPr>
-            <a:r>
-              <a:rPr sz="1500">
-                <a:solidFill>
-                  <a:srgbClr val="22282E"/>
-                </a:solidFill>
-              </a:rPr>
-              <a:t>•  Identifica en Ghidra un uso peligroso de system() en un binario del firmware.</a:t>
-            </a:r>
-          </a:p>
-          <a:p>
-            <a:pPr>
-              <a:spcAft>
-                <a:spcPts val="600"/>
-              </a:spcAft>
-            </a:pPr>
-            <a:r>
-              <a:rPr sz="1500">
-                <a:solidFill>
-                  <a:srgbClr val="22282E"/>
-                </a:solidFill>
-              </a:rPr>
-              <a:t>•  Emula el firmware y accede a su panel web.</a:t>
-            </a:r>
-          </a:p>
-          <a:p>
-            <a:pPr>
-              <a:spcAft>
-                <a:spcPts val="600"/>
-              </a:spcAft>
-            </a:pPr>
-            <a:r>
-              <a:rPr sz="1500">
-                <a:solidFill>
-                  <a:srgbClr val="22282E"/>
-                </a:solidFill>
-              </a:rPr>
-              <a:t>•  Determina si la actualización del dispositivo está firmada.</a:t>
+              <a:t>•  binwalk: herramienta que identifica y extrae firmas de archivos dentro de una imagen de firmware. Característica: automatiza la extracción del sistema de ficheros.</a:t>
+            </a:r>
+          </a:p>
+          <a:p>
+            <a:pPr>
+              <a:spcAft>
+                <a:spcPts val="600"/>
+              </a:spcAft>
+            </a:pPr>
+            <a:r>
+              <a:rPr sz="1500">
+                <a:solidFill>
+                  <a:srgbClr val="22282E"/>
+                </a:solidFill>
+              </a:rPr>
+              <a:t>•  SquashFS: sistema de ficheros comprimido de solo lectura muy común en IoT. Característica: se monta/extrae con unsquashfs.</a:t>
+            </a:r>
+          </a:p>
+          <a:p>
+            <a:pPr>
+              <a:spcAft>
+                <a:spcPts val="600"/>
+              </a:spcAft>
+            </a:pPr>
+            <a:r>
+              <a:rPr sz="1500">
+                <a:solidFill>
+                  <a:srgbClr val="22282E"/>
+                </a:solidFill>
+              </a:rPr>
+              <a:t>•  Firmware Analysis Toolkit (FAT)/Firmadyne: entorno de emulación de firmware con QEMU. Característica: permite ejecutar la interfaz web del dispositivo sin hardware.</a:t>
+            </a:r>
+          </a:p>
+          <a:p>
+            <a:pPr>
+              <a:spcAft>
+                <a:spcPts val="600"/>
+              </a:spcAft>
+            </a:pPr>
+            <a:r>
+              <a:rPr sz="1500">
+                <a:solidFill>
+                  <a:srgbClr val="22282E"/>
+                </a:solidFill>
+              </a:rPr>
+              <a:t>•  Bootloader (U-Boot): cargador de arranque de sistemas embebidos. Característica: su consola puede permitir volcar/flashear memoria.</a:t>
+            </a:r>
+          </a:p>
+          <a:p>
+            <a:pPr>
+              <a:spcAft>
+                <a:spcPts val="600"/>
+              </a:spcAft>
+            </a:pPr>
+            <a:r>
+              <a:rPr sz="1500">
+                <a:solidFill>
+                  <a:srgbClr val="22282E"/>
+                </a:solidFill>
+              </a:rPr>
+              <a:t>•  Firma de firmware: verificación criptográfica de integridad y origen del OTA. Característica: si falta, se puede instalar firmware modificado.</a:t>
+            </a:r>
+          </a:p>
+          <a:p>
+            <a:pPr>
+              <a:spcAft>
+                <a:spcPts val="600"/>
+              </a:spcAft>
+            </a:pPr>
+            <a:r>
+              <a:rPr sz="1500">
+                <a:solidFill>
+                  <a:srgbClr val="22282E"/>
+                </a:solidFill>
+              </a:rPr>
+              <a:t>•  Entropía: medida de aleatoriedad; alta entropía sugiere cifrado o compresión. Característica: ayuda a detectar particiones cifradas.</a:t>
             </a:r>
           </a:p>
         </p:txBody>
@@ -4778,7 +5169,7 @@
                   <a:srgbClr val="0B3D2E"/>
                 </a:solidFill>
               </a:rPr>
-              <a:t>📝 Reto verificable</a:t>
+              <a:t>🧰 Herramientas y preparación</a:t>
             </a:r>
           </a:p>
         </p:txBody>
@@ -4816,7 +5207,7 @@
                   <a:srgbClr val="22282E"/>
                 </a:solidFill>
               </a:rPr>
-              <a:t>•  Analiza una imagen de firmware (propia o de práctica) y produce un informe con al menos dos hallazgos: una credencial/clave embebida y una función potencialmente vulnerable en un binario. Criterio de aceptación: para el binario, señalas la dirección/función concreta en Ghidra y explicas por qué el uso es peligroso; para la credencial, indicas el fichero exacto donde la hallaste.</a:t>
+              <a:t>•  Ghidra para binarios extraídos; qemu-user para ejecutar binarios ARM/MIPS.</a:t>
             </a:r>
           </a:p>
         </p:txBody>
